--- a/teacher/plan/graphrag-search-실습가이드.pptx
+++ b/teacher/plan/graphrag-search-실습가이드.pptx
@@ -508,7 +508,7 @@
             <a:r>
               <a:rPr lang="en-US" dirty="0"/>
               <a:t>슬라이드 1: GraphRAG 검색 실습: 무엇을 만들고 어떻게 진행하나
-교재 64쪽 카드 4장이 그대로 코드가 됨. 툴 고르기는 Opus, 판단은 Jev(확률만), 막는 일은 코드, 툴 안은 고정 순서
+교재 64쪽 카드 4장이 그대로 코드가 됨. 툴 고르기는 에이전트(Groq), 판단은 Jev(확률만), 막는 일은 코드, 툴 안은 고정 순서
 ③ ~ ⑤는 LangChain create_agent가 고리를 돌리고, GuardMiddleware와 ToolWrapperMiddleware가 상한, 강제 종료, 필터, 채점을 맡음
 글을 만드는 LLM 호출(G1, G2, ⑧)은 모두 LCEL 체인과 구조화 출력으로 짬
 상세 문서: https://github.com/unicorn-campus/hybrid-ai/blob/main/teacher/plan/graphrag-search-실습가이드.md</a:t>
@@ -602,7 +602,7 @@
               <a:t>슬라이드 2: 사전 준비 4가지와 수업에서 쓰는 명령 2개
 사전 준비가 끝났는지는 Q01 실행 한 번으로 확인함. 시작 검사가 모자란 것을 「→ 할 일」로 출력함
 키는 환경변수에 올리지 않고 클라이언트마다 인자로 넘김. SDK 기본 이름과 달라 직접 넘기는 것임
-프롬프트 캐시(5분)를 켜 두어 회차가 늘어도 Opus 입력 비용은 작음. 비용은 주로 출력(생각 포함)임
+앞부분이 같은 입력은 Groq가 자동으로 캐시해 회차가 늘어도 입력 비용이 작음. 질문 하나에 1센트 미만
 상세 문서: https://github.com/unicorn-campus/hybrid-ai/blob/main/hands-on/solutions/graphrag/retriever/README.md</a:t>
             </a:r>
             <a:endParaRPr lang="en-US" dirty="0"/>
@@ -786,7 +786,7 @@
               <a:t>슬라이드 4: 교시 3: ④ 검색엔진과 Local 검색, ⑤ 채점과 상한(실습 함수 4개 + 선택 1개)
 L2 ~ L4는 교재에서 Cypher 한 번이지만, 실습 예제는 L2 축소를 파이썬 함수로 꺼내려고 Cypher를 두 번 부름
 회원 필터로 고른 그 회원의 상담 원문은 Jev 관련 확률로 빼지 않음. Jev가 「이 회원」 질문을 낮게 매기는 편이라서임(실측)
-force_stop_reason을 잘못 채워도 main의 하드 상한(Opus 6번, 180초)이 고리를 끊음
+force_stop_reason을 잘못 채워도 main의 하드 상한(에이전트 호출 6번, 180초)이 고리를 끊음
 상세 문서: https://github.com/unicorn-campus/hybrid-ai/blob/main/hands-on/solutions/graphrag/retriever/core_search.py</a:t>
             </a:r>
             <a:endParaRPr lang="en-US" dirty="0"/>
@@ -970,7 +970,7 @@
               <a:t>슬라이드 6: 본인 코드로 바꿔 끼우기: import 한 줄과 USE_TEACHER_CODE 목록
 인덱싱 실습과 같은 교체 방식임(import 한 줄 + 함수 단위로 강사 코드 대체)
 실습 중에는 함수 하나를 고칠 때마다 질문 한두 개만 돌려 비용을 아낌. 평가셋 일괄(--eval)은 강사만 돌림
-제출 화면에는 Opus 비용 줄이 들어가게 캡처함
+제출 화면에는 에이전트 비용 줄이 들어가게 캡처함
 상세 문서: https://github.com/unicorn-campus/hybrid-ai/blob/main/hands-on/solutions/graphrag/retriever/my_search.py</a:t>
             </a:r>
             <a:endParaRPr lang="en-US" dirty="0"/>
@@ -1644,7 +1644,7 @@
                 <a:ea typeface="Pretendard SemiBold" pitchFamily="34" charset="-122"/>
                 <a:cs typeface="Pretendard SemiBold" pitchFamily="34" charset="-120"/>
               </a:rPr>
-              <a:t>인덱싱 실습이 만든 그래프와 검색엔진에서 Opus가 툴을 골라 근거를 모으고, 판단은 Jev가, 막는 일은 코드가 맡음</a:t>
+              <a:t>인덱싱 실습이 만든 그래프와 검색엔진에서 에이전트(Groq)가 툴을 골라 근거를 모으고, 판단은 Jev가, 막는 일은 코드가 맡음</a:t>
             </a:r>
             <a:endParaRPr lang="en-US" sz="1800" dirty="0"/>
           </a:p>
@@ -3525,13 +3525,13 @@
           <a:p>
             <a:pPr algn="l" marL="228600" indent="-228600">
               <a:spcAft>
-                <a:spcPts val="800"/>
+                <a:spcPts val="1200"/>
               </a:spcAft>
               <a:buSzPct val="100000"/>
               <a:buChar char="•"/>
             </a:pPr>
             <a:r>
-              <a:rPr lang="en-US" sz="1800" dirty="0">
+              <a:rPr lang="en-US" sz="1500" dirty="0">
                 <a:solidFill>
                   <a:srgbClr val="2B3242"/>
                 </a:solidFill>
@@ -3541,18 +3541,18 @@
               </a:rPr>
               <a:t>13개 함수(직접 7, 빈칸 6)를 my_search.py에 채워 바꿔 끼움</a:t>
             </a:r>
-            <a:endParaRPr lang="en-US" sz="1800" dirty="0"/>
+            <a:endParaRPr lang="en-US" sz="1500" dirty="0"/>
           </a:p>
           <a:p>
             <a:pPr algn="l" marL="228600" indent="-228600">
               <a:spcAft>
-                <a:spcPts val="800"/>
+                <a:spcPts val="1200"/>
               </a:spcAft>
               <a:buSzPct val="100000"/>
               <a:buChar char="•"/>
             </a:pPr>
             <a:r>
-              <a:rPr lang="en-US" sz="1800" dirty="0">
+              <a:rPr lang="en-US" sz="1500" dirty="0">
                 <a:solidFill>
                   <a:srgbClr val="2B3242"/>
                 </a:solidFill>
@@ -3562,18 +3562,18 @@
               </a:rPr>
               <a:t>안 채운 함수는 강사 코드가 대신 돌아 늘 ⑩까지 완주</a:t>
             </a:r>
-            <a:endParaRPr lang="en-US" sz="1800" dirty="0"/>
+            <a:endParaRPr lang="en-US" sz="1500" dirty="0"/>
           </a:p>
           <a:p>
             <a:pPr algn="l" marL="228600" indent="-228600">
               <a:spcAft>
-                <a:spcPts val="800"/>
+                <a:spcPts val="1200"/>
               </a:spcAft>
               <a:buSzPct val="100000"/>
               <a:buChar char="•"/>
             </a:pPr>
             <a:r>
-              <a:rPr lang="en-US" sz="1800" dirty="0">
+              <a:rPr lang="en-US" sz="1500" dirty="0">
                 <a:solidFill>
                   <a:srgbClr val="2B3242"/>
                 </a:solidFill>
@@ -3581,9 +3581,9 @@
                 <a:ea typeface="Pretendard" pitchFamily="34" charset="-122"/>
                 <a:cs typeface="Pretendard" pitchFamily="34" charset="-120"/>
               </a:rPr>
-              <a:t>실행마다 Opus 실제 비용이 찍힘(질문 하나 약 $0.02 ~ 0.05)</a:t>
+              <a:t>실행마다 에이전트(Groq) 실제 비용이 찍힘(질문 하나 약 $0.001 ~ 0.005)</a:t>
             </a:r>
-            <a:endParaRPr lang="en-US" sz="1800" dirty="0"/>
+            <a:endParaRPr lang="en-US" sz="1500" dirty="0"/>
           </a:p>
         </p:txBody>
       </p:sp>
@@ -3930,7 +3930,7 @@
                 <a:ea typeface="Pretendard SemiBold" pitchFamily="34" charset="-122"/>
                 <a:cs typeface="Pretendard SemiBold" pitchFamily="34" charset="-120"/>
               </a:rPr>
-              <a:t>시작 검사가 활성 세대, Neo4j, OpenSearch, 키 4개를 한 번에 확인하고 모자란 것을 알려 줌</a:t>
+              <a:t>시작 검사가 활성 세대, Neo4j, OpenSearch, 키 3개를 한 번에 확인하고 모자란 것을 알려 줌</a:t>
             </a:r>
             <a:endParaRPr lang="en-US" sz="1800" dirty="0"/>
           </a:p>
@@ -4354,7 +4354,7 @@
                 <a:ea typeface="Pretendard" pitchFamily="34" charset="-122"/>
                 <a:cs typeface="Pretendard" pitchFamily="34" charset="-120"/>
               </a:rPr>
-              <a:t>공용 가상환경에 패키지 2개 추가(README 3장)</a:t>
+              <a:t>공용 가상환경에 패키지 1개 추가(README 3장)</a:t>
             </a:r>
             <a:endParaRPr lang="en-US" sz="1600" dirty="0"/>
           </a:p>
@@ -4481,7 +4481,7 @@
                 <a:ea typeface="Pretendard" pitchFamily="34" charset="-122"/>
                 <a:cs typeface="Pretendard" pitchFamily="34" charset="-120"/>
               </a:rPr>
-              <a:t>secrets/.env에 키 4줄: CLAUDE, JEV, GROQ, COHERE</a:t>
+              <a:t>secrets/.env에 키 3줄: JEV, GROQ, COHERE</a:t>
             </a:r>
             <a:endParaRPr lang="en-US" sz="1600" dirty="0"/>
           </a:p>
@@ -4594,7 +4594,7 @@
                 <a:ea typeface="Pretendard" pitchFamily="34" charset="-122"/>
                 <a:cs typeface="Pretendard" pitchFamily="34" charset="-120"/>
               </a:rPr>
-              <a:t>약관 사실 질문을 ① ~ ⑩ 끝까지(약 15초). 「답변 완료」와 Opus 비용 줄을 봄</a:t>
+              <a:t>약관 사실 질문을 ① ~ ⑩ 끝까지(약 7 ~ 10초). 「답변 완료」와 에이전트 비용 줄을 봄</a:t>
             </a:r>
             <a:endParaRPr lang="en-US" sz="1500" dirty="0"/>
           </a:p>
@@ -5439,7 +5439,7 @@
                           <a:ea typeface="Pretendard" pitchFamily="34" charset="-122"/>
                           <a:cs typeface="Pretendard" pitchFamily="34" charset="-120"/>
                         </a:rPr>
-                        <a:t>답변 완료, 약 $0.02</a:t>
+                        <a:t>답변 완료, 약 $0.001</a:t>
                       </a:r>
                       <a:endParaRPr lang="en-US" sz="1400" dirty="0">
                         <a:latin typeface="Pretendard" charset="0"/>
@@ -5548,7 +5548,7 @@
                 <a:ea typeface="Pretendard" pitchFamily="34" charset="-122"/>
                 <a:cs typeface="Pretendard" pitchFamily="34" charset="-120"/>
               </a:rPr>
-              <a:t>Opus는 temperature를 줄 수 없어 실행마다 고르는 툴이 다를 수 있음. 강사와는 신호, 판정, 종료 상태로 비교함</a:t>
+              <a:t>temperature 0이어도 LLM은 실행마다 고르는 툴이 다를 수 있음. 강사와는 신호, 판정, 종료 상태로 비교함</a:t>
             </a:r>
             <a:endParaRPr lang="en-US" sz="1600" dirty="0"/>
           </a:p>
@@ -7696,7 +7696,7 @@
                 <a:ea typeface="Pretendard" pitchFamily="34" charset="-122"/>
                 <a:cs typeface="Pretendard" pitchFamily="34" charset="-120"/>
               </a:rPr>
-              <a:t>③ 회차 줄과 Opus가 고른 툴</a:t>
+              <a:t>③ 회차 줄과 에이전트가 고른 툴</a:t>
             </a:r>
             <a:endParaRPr lang="en-US" sz="1500" dirty="0"/>
           </a:p>
@@ -13324,7 +13324,7 @@
                 <a:ea typeface="Pretendard" pitchFamily="34" charset="-122"/>
                 <a:cs typeface="Pretendard" pitchFamily="34" charset="-120"/>
               </a:rPr>
-              <a:t>함정 5문항 × 3회 실측에서 15번 모두 「확인할 수 없음」. ⑦ 코드 재확인과 Jev만으로 14번 막았고, 1번은 에이전트가 먼저 멈춤</a:t>
+              <a:t>함정 5문항 × 3회 실측(에이전트 Groq)에서 15번 모두 「확인할 수 없음」이고 15번 모두 ⑦ 코드 재확인과 Jev가 막음</a:t>
             </a:r>
             <a:endParaRPr lang="en-US" sz="1500" dirty="0"/>
           </a:p>

--- a/teacher/plan/graphrag-search-실습가이드.pptx
+++ b/teacher/plan/graphrag-search-실습가이드.pptx
@@ -4354,7 +4354,7 @@
                 <a:ea typeface="Pretendard" pitchFamily="34" charset="-122"/>
                 <a:cs typeface="Pretendard" pitchFamily="34" charset="-120"/>
               </a:rPr>
-              <a:t>공용 가상환경에 패키지 1개 추가(README 3장)</a:t>
+              <a:t>graphrag 폴더의 공용 가상환경 활성화(graphrag/README.md 3절)</a:t>
             </a:r>
             <a:endParaRPr lang="en-US" sz="1600" dirty="0"/>
           </a:p>
@@ -4524,7 +4524,7 @@
                 <a:ea typeface="Pretendard" pitchFamily="34" charset="-122"/>
                 <a:cs typeface="Pretendard" pitchFamily="34" charset="-120"/>
               </a:rPr>
-              <a:t>수업용 명령 2개(retriever 폴더에서)</a:t>
+              <a:t>수업용 명령 2개(활성화 뒤 retriever 폴더에서)</a:t>
             </a:r>
             <a:endParaRPr lang="en-US" sz="1800" dirty="0"/>
           </a:p>
@@ -4574,7 +4574,7 @@
                 <a:ea typeface="Pretendard" pitchFamily="34" charset="-122"/>
                 <a:cs typeface="Pretendard" pitchFamily="34" charset="-120"/>
               </a:rPr>
-              <a:t>../.venv/Scripts/python.exe search_graph.py --qid Q01</a:t>
+              <a:t>python search_graph.py --qid Q01</a:t>
             </a:r>
             <a:endParaRPr lang="en-US" sz="1500" dirty="0"/>
           </a:p>
@@ -4614,7 +4614,7 @@
                 <a:ea typeface="Pretendard" pitchFamily="34" charset="-122"/>
                 <a:cs typeface="Pretendard" pitchFamily="34" charset="-120"/>
               </a:rPr>
-              <a:t>../.venv/Scripts/python.exe search_graph.py --qid Q19</a:t>
+              <a:t>python search_graph.py --qid Q19</a:t>
             </a:r>
             <a:endParaRPr lang="en-US" sz="1500" dirty="0"/>
           </a:p>
@@ -4634,7 +4634,7 @@
                 <a:ea typeface="Pretendard" pitchFamily="34" charset="-122"/>
                 <a:cs typeface="Pretendard" pitchFamily="34" charset="-120"/>
               </a:rPr>
-              <a:t>함정 질문(가족돌봄 카드에 없는 해외 수수료 할인)이 「확인할 수 없음」으로 멈춤(macOS는 ../.venv/bin/python)</a:t>
+              <a:t>함정 질문(가족돌봄 카드에 없는 해외 수수료 할인)이 「확인할 수 없음」으로 멈춤. 프롬프트에 (.venv)가 없으면 먼저 활성화</a:t>
             </a:r>
             <a:endParaRPr lang="en-US" sz="1500" dirty="0"/>
           </a:p>
